--- a/assets/pptx/catalog-414.pptx
+++ b/assets/pptx/catalog-414.pptx
@@ -3529,7 +3529,7 @@
                 <a:ea typeface="Ebrima"/>
                 <a:cs typeface="Ebrima"/>
               </a:rPr>
-              <a:t>ለእኔ የተደረገው ብዙ እኮ ነው ለእኔ የተሰራው ብዙ እኮ ነው አንድ በአንድ እቆጥራለሁ የእርሱን መልካምነት እናገረዋለሁ (2x)</a:t>
+              <a:t>ለእኔ የተደረገው ብዙ እኮ ነው ለእኔ የተሰራው ብዙ እኮ ነው አንድ በአንድ እቆጥራለሁ የእርሱን መልካምነት እናገረዋለሁ 2x</a:t>
             </a:r>
           </a:p>
         </p:txBody>
@@ -3864,7 +3864,7 @@
                 <a:ea typeface="Ebrima"/>
                 <a:cs typeface="Ebrima"/>
               </a:rPr>
-              <a:t>ቸር ነው (2x) ምሕረቱ ብዙ ነው ፍቅሩ የማያልቅ ነው (2x)</a:t>
+              <a:t>ቸር ነው 2x ምሕረቱ ብዙ ነው ፍቅሩ የማያልቅ ነው 2x</a:t>
             </a:r>
           </a:p>
         </p:txBody>
@@ -4065,7 +4065,7 @@
                 <a:ea typeface="Ebrima"/>
                 <a:cs typeface="Ebrima"/>
               </a:rPr>
-              <a:t>ለክብሩ እኔን መረጠኝ (2x)</a:t>
+              <a:t>ለክብሩ እኔን መረጠኝ 2x</a:t>
             </a:r>
           </a:p>
         </p:txBody>
@@ -4132,7 +4132,7 @@
                 <a:ea typeface="Ebrima"/>
                 <a:cs typeface="Ebrima"/>
               </a:rPr>
-              <a:t>(ወደደኝ አዳነኝ ለክብሩ እኔን መረጠኝ (2x))</a:t>
+              <a:t>ወደደኝ አዳነኝ ለክብሩ እኔን መረጠኝ 2x</a:t>
             </a:r>
           </a:p>
         </p:txBody>
@@ -4333,7 +4333,7 @@
                 <a:ea typeface="Ebrima"/>
                 <a:cs typeface="Ebrima"/>
               </a:rPr>
-              <a:t>ንጉሥ ላፈቀረው ካባ ይደረብለታል (2x)</a:t>
+              <a:t>ንጉሥ ላፈቀረው ካባ ይደረብለታል 2x</a:t>
             </a:r>
           </a:p>
         </p:txBody>
@@ -4601,7 +4601,7 @@
                 <a:ea typeface="Ebrima"/>
                 <a:cs typeface="Ebrima"/>
               </a:rPr>
-              <a:t>ለእኔ የተደረገው ብዙ እኮ ነው ለእኔ የተሰራው ብዙ እኮ ነው አንድ በአንድ እቆጥራለሁ የእርሱን መልካምነት እናገረዋለሁ (2x)</a:t>
+              <a:t>ለእኔ የተደረገው ብዙ እኮ ነው ለእኔ የተሰራው ብዙ እኮ ነው አንድ በአንድ እቆጥራለሁ የእርሱን መልካምነት እናገረዋለሁ 2x</a:t>
             </a:r>
           </a:p>
         </p:txBody>
